--- a/files/teaching-resources/concordiacollege-busn-315/busn-315-lecture-note/busn315-ch07.pptx
+++ b/files/teaching-resources/concordiacollege-busn-315/busn-315-lecture-note/busn315-ch07.pptx
@@ -239,7 +239,7 @@
           <a:p>
             <a:fld id="{2D359EC7-19C7-4638-A61A-0E2B59861576}" type="datetimeFigureOut">
               <a:rPr lang="en-US" smtClean="0"/>
-              <a:t>3/9/2026</a:t>
+              <a:t>3/19/2026</a:t>
             </a:fld>
             <a:endParaRPr lang="en-US"/>
           </a:p>
@@ -3493,7 +3493,7 @@
           <a:p>
             <a:fld id="{DFCAFFB9-A874-4FD1-A824-B4042D61D1ED}" type="datetime1">
               <a:rPr lang="en-US" smtClean="0"/>
-              <a:t>3/9/2026</a:t>
+              <a:t>3/19/2026</a:t>
             </a:fld>
             <a:endParaRPr lang="en-US"/>
           </a:p>
@@ -3664,7 +3664,7 @@
           <a:p>
             <a:fld id="{D290497A-627B-46A8-B138-876D4281251E}" type="datetime1">
               <a:rPr lang="en-US" smtClean="0"/>
-              <a:t>3/9/2026</a:t>
+              <a:t>3/19/2026</a:t>
             </a:fld>
             <a:endParaRPr lang="en-US"/>
           </a:p>
@@ -3845,7 +3845,7 @@
           <a:p>
             <a:fld id="{81749246-640D-41B6-A07B-C0FA43D7FEE2}" type="datetime1">
               <a:rPr lang="en-US" smtClean="0"/>
-              <a:t>3/9/2026</a:t>
+              <a:t>3/19/2026</a:t>
             </a:fld>
             <a:endParaRPr lang="en-US"/>
           </a:p>
@@ -4016,7 +4016,7 @@
           <a:p>
             <a:fld id="{2EF79C1E-59CB-458D-A8DF-3DF069B9691A}" type="datetime1">
               <a:rPr lang="en-US" smtClean="0"/>
-              <a:t>3/9/2026</a:t>
+              <a:t>3/19/2026</a:t>
             </a:fld>
             <a:endParaRPr lang="en-US"/>
           </a:p>
@@ -4264,7 +4264,7 @@
           <a:p>
             <a:fld id="{40B038F5-1F4F-49BC-AE81-A69593E39F17}" type="datetime1">
               <a:rPr lang="en-US" smtClean="0"/>
-              <a:t>3/9/2026</a:t>
+              <a:t>3/19/2026</a:t>
             </a:fld>
             <a:endParaRPr lang="en-US"/>
           </a:p>
@@ -4552,7 +4552,7 @@
           <a:p>
             <a:fld id="{3F2B9C03-4953-4667-8B38-5F82E8B7824A}" type="datetime1">
               <a:rPr lang="en-US" smtClean="0"/>
-              <a:t>3/9/2026</a:t>
+              <a:t>3/19/2026</a:t>
             </a:fld>
             <a:endParaRPr lang="en-US"/>
           </a:p>
@@ -4974,7 +4974,7 @@
           <a:p>
             <a:fld id="{CCFF53C9-7EE5-4279-90C5-33FD7C6945F2}" type="datetime1">
               <a:rPr lang="en-US" smtClean="0"/>
-              <a:t>3/9/2026</a:t>
+              <a:t>3/19/2026</a:t>
             </a:fld>
             <a:endParaRPr lang="en-US"/>
           </a:p>
@@ -5094,7 +5094,7 @@
           <a:p>
             <a:fld id="{604720FA-FDEE-4E83-A4C7-BC2FB4952465}" type="datetime1">
               <a:rPr lang="en-US" smtClean="0"/>
-              <a:t>3/9/2026</a:t>
+              <a:t>3/19/2026</a:t>
             </a:fld>
             <a:endParaRPr lang="en-US"/>
           </a:p>
@@ -5192,7 +5192,7 @@
           <a:p>
             <a:fld id="{F4851516-679C-4D73-B89D-29E30821AF23}" type="datetime1">
               <a:rPr lang="en-US" smtClean="0"/>
-              <a:t>3/9/2026</a:t>
+              <a:t>3/19/2026</a:t>
             </a:fld>
             <a:endParaRPr lang="en-US"/>
           </a:p>
@@ -5470,7 +5470,7 @@
           <a:p>
             <a:fld id="{6B003A1F-F54C-4527-A898-553BBCF40EAB}" type="datetime1">
               <a:rPr lang="en-US" smtClean="0"/>
-              <a:t>3/9/2026</a:t>
+              <a:t>3/19/2026</a:t>
             </a:fld>
             <a:endParaRPr lang="en-US"/>
           </a:p>
@@ -5725,7 +5725,7 @@
           <a:p>
             <a:fld id="{12FD13F6-D87E-4E9E-B027-94AE4C3308CD}" type="datetime1">
               <a:rPr lang="en-US" smtClean="0"/>
-              <a:t>3/9/2026</a:t>
+              <a:t>3/19/2026</a:t>
             </a:fld>
             <a:endParaRPr lang="en-US"/>
           </a:p>
@@ -5939,7 +5939,7 @@
           <a:p>
             <a:fld id="{5BE17758-26A5-42DB-960B-17BBCDA98EFC}" type="datetime1">
               <a:rPr lang="en-US" smtClean="0"/>
-              <a:t>3/9/2026</a:t>
+              <a:t>3/19/2026</a:t>
             </a:fld>
             <a:endParaRPr lang="en-US"/>
           </a:p>
@@ -10263,7 +10263,7 @@
               </a:defRPr>
             </a:pPr>
             <a:r>
-              <a:rPr lang="en-US" altLang="zh-TW" sz="2400" dirty="0"/>
+              <a:rPr lang="en-US" altLang="zh-TW" sz="2400" b="1" dirty="0"/>
               <a:t>Email</a:t>
             </a:r>
           </a:p>
@@ -10302,8 +10302,8 @@
               </a:defRPr>
             </a:pPr>
             <a:r>
-              <a:rPr lang="en-US" altLang="zh-TW" sz="2400" dirty="0"/>
-              <a:t>Instant messaging</a:t>
+              <a:rPr lang="en-US" altLang="zh-TW" sz="2400" b="1" dirty="0"/>
+              <a:t>Instant Messaging</a:t>
             </a:r>
           </a:p>
           <a:p>
@@ -11361,7 +11361,7 @@
               </a:defRPr>
             </a:pPr>
             <a:r>
-              <a:rPr lang="en-US" altLang="zh-TW" sz="2400" dirty="0"/>
+              <a:rPr lang="en-US" altLang="zh-TW" sz="2400" b="1" dirty="0"/>
               <a:t>VoIP</a:t>
             </a:r>
           </a:p>
@@ -11429,7 +11429,7 @@
             </a:pPr>
             <a:r>
               <a:rPr lang="en-US" altLang="zh-TW" sz="2400" dirty="0"/>
-              <a:t>Cost advantages</a:t>
+              <a:t>Cost Advantages</a:t>
             </a:r>
           </a:p>
           <a:p>
@@ -11482,7 +11482,7 @@
             </a:pPr>
             <a:r>
               <a:rPr lang="en-US" altLang="zh-TW" sz="2400" dirty="0"/>
-              <a:t>Business capabilities</a:t>
+              <a:t>Business Capabilities</a:t>
             </a:r>
           </a:p>
           <a:p>
@@ -12856,8 +12856,12 @@
               </a:defRPr>
             </a:pPr>
             <a:r>
+              <a:rPr lang="en-US" altLang="zh-TW" sz="2400" b="1" dirty="0"/>
+              <a:t>Unified Communications as a Service</a:t>
+            </a:r>
+            <a:r>
               <a:rPr lang="en-US" altLang="zh-TW" sz="2400" dirty="0"/>
-              <a:t>Unified Communications as a Service (</a:t>
+              <a:t> (</a:t>
             </a:r>
             <a:r>
               <a:rPr lang="en-US" altLang="zh-TW" sz="2400" dirty="0" err="1"/>
@@ -18431,8 +18435,12 @@
               </a:defRPr>
             </a:pPr>
             <a:r>
+              <a:rPr lang="en-US" altLang="zh-TW" sz="2400" b="1" dirty="0"/>
+              <a:t>Search Engine Marketing (SEM)</a:t>
+            </a:r>
+            <a:r>
               <a:rPr lang="en-US" altLang="zh-TW" sz="2400" dirty="0"/>
-              <a:t>Search Engine Marketing (SEM): Paid ads that appear when users search chosen keywords.</a:t>
+              <a:t>: Paid ads that appear when users search chosen keywords.</a:t>
             </a:r>
           </a:p>
           <a:p>
@@ -18456,8 +18464,12 @@
               </a:defRPr>
             </a:pPr>
             <a:r>
+              <a:rPr lang="en-US" altLang="zh-TW" sz="2400" b="1" dirty="0"/>
+              <a:t>Search Engine Optimization (SEO)</a:t>
+            </a:r>
+            <a:r>
               <a:rPr lang="en-US" altLang="zh-TW" sz="2400" dirty="0"/>
-              <a:t>Search Engine Optimization (SEO): Improving site structure and content for organic visibility.</a:t>
+              <a:t>: Improving site structure and content for organic visibility.</a:t>
             </a:r>
           </a:p>
           <a:p>
